--- a/docs/RokidLab-项目介绍.pptx
+++ b/docs/RokidLab-项目介绍.pptx
@@ -4852,7 +4852,7 @@
             <a:avLst/>
           </a:prstGeom>
           <a:solidFill>
-            <a:srgbClr val="E85D3F"/>
+            <a:srgbClr val="7D7A70"/>
           </a:solidFill>
           <a:ln/>
         </p:spPr>
@@ -4890,7 +4890,7 @@
                 <a:ea typeface="JetBrains Mono" pitchFamily="34" charset="-122"/>
                 <a:cs typeface="JetBrains Mono" pitchFamily="34" charset="-120"/>
               </a:rPr>
-              <a:t>v2.0 更新亮点</a:t>
+              <a:t>国际化 &amp; 设置</a:t>
             </a:r>
             <a:endParaRPr lang="en-US" sz="3600" dirty="0"/>
           </a:p>
@@ -4929,7 +4929,7 @@
                 <a:ea typeface="JetBrains Mono" pitchFamily="34" charset="-122"/>
                 <a:cs typeface="JetBrains Mono" pitchFamily="34" charset="-120"/>
               </a:rPr>
-              <a:t>What's New in v2.0</a:t>
+              <a:t>Internationalization &amp; Settings</a:t>
             </a:r>
             <a:endParaRPr lang="en-US" sz="1600" dirty="0"/>
           </a:p>
@@ -4963,182 +4963,18 @@
         </p:nvSpPr>
         <p:spPr>
           <a:xfrm>
-            <a:off x="731520" y="2194560"/>
-            <a:ext cx="10515600" cy="548640"/>
+            <a:off x="457200" y="2103120"/>
+            <a:ext cx="5486400" cy="3931920"/>
           </a:xfrm>
           <a:prstGeom prst="roundRect">
             <a:avLst>
-              <a:gd name="adj" fmla="val 13333"/>
+              <a:gd name="adj" fmla="val 2791"/>
             </a:avLst>
           </a:prstGeom>
           <a:solidFill>
             <a:srgbClr val="151518"/>
           </a:solidFill>
-          <a:ln w="25400">
-            <a:solidFill>
-              <a:srgbClr val="E85D3F"/>
-            </a:solidFill>
-            <a:prstDash val="solid"/>
-          </a:ln>
-        </p:spPr>
-      </p:sp>
-      <p:sp>
-        <p:nvSpPr>
-          <p:cNvPr id="7" name="Shape 5"/>
-          <p:cNvSpPr/>
-          <p:nvPr/>
-        </p:nvSpPr>
-        <p:spPr>
-          <a:xfrm>
-            <a:off x="1005840" y="2304288"/>
-            <a:ext cx="320040" cy="320040"/>
-          </a:xfrm>
-          <a:prstGeom prst="ellipse">
-            <a:avLst/>
-          </a:prstGeom>
-          <a:solidFill>
-            <a:srgbClr val="E85D3F"/>
-          </a:solidFill>
-          <a:ln/>
-        </p:spPr>
-      </p:sp>
-      <p:sp>
-        <p:nvSpPr>
-          <p:cNvPr id="8" name="Text 6"/>
-          <p:cNvSpPr/>
-          <p:nvPr/>
-        </p:nvSpPr>
-        <p:spPr>
-          <a:xfrm>
-            <a:off x="1005840" y="2304288"/>
-            <a:ext cx="320040" cy="320040"/>
-          </a:xfrm>
-          <a:prstGeom prst="rect">
-            <a:avLst/>
-          </a:prstGeom>
-          <a:noFill/>
-          <a:ln/>
-        </p:spPr>
-        <p:txBody>
-          <a:bodyPr wrap="square" rtlCol="0" anchor="ctr"/>
-          <a:lstStyle/>
-          <a:p>
-            <a:pPr algn="ctr" indent="0" marL="0">
-              <a:buNone/>
-            </a:pPr>
-            <a:r>
-              <a:rPr lang="en-US" sz="1400" b="1" dirty="0">
-                <a:solidFill>
-                  <a:srgbClr val="0B0B0E"/>
-                </a:solidFill>
-                <a:latin typeface="JetBrains Mono" pitchFamily="34" charset="0"/>
-                <a:ea typeface="JetBrains Mono" pitchFamily="34" charset="-122"/>
-                <a:cs typeface="JetBrains Mono" pitchFamily="34" charset="-120"/>
-              </a:rPr>
-              <a:t>1</a:t>
-            </a:r>
-            <a:endParaRPr lang="en-US" sz="1400" dirty="0"/>
-          </a:p>
-        </p:txBody>
-      </p:sp>
-      <p:sp>
-        <p:nvSpPr>
-          <p:cNvPr id="9" name="Text 7"/>
-          <p:cNvSpPr/>
-          <p:nvPr/>
-        </p:nvSpPr>
-        <p:spPr>
-          <a:xfrm>
-            <a:off x="1554480" y="2194560"/>
-            <a:ext cx="2743200" cy="548640"/>
-          </a:xfrm>
-          <a:prstGeom prst="rect">
-            <a:avLst/>
-          </a:prstGeom>
-          <a:noFill/>
-          <a:ln/>
-        </p:spPr>
-        <p:txBody>
-          <a:bodyPr wrap="square" rtlCol="0" anchor="ctr"/>
-          <a:lstStyle/>
-          <a:p>
-            <a:pPr indent="0" marL="0">
-              <a:buNone/>
-            </a:pPr>
-            <a:r>
-              <a:rPr lang="en-US" sz="1600" b="1" dirty="0">
-                <a:solidFill>
-                  <a:srgbClr val="F2EFEA"/>
-                </a:solidFill>
-                <a:latin typeface="JetBrains Mono" pitchFamily="34" charset="0"/>
-                <a:ea typeface="JetBrains Mono" pitchFamily="34" charset="-122"/>
-                <a:cs typeface="JetBrains Mono" pitchFamily="34" charset="-120"/>
-              </a:rPr>
-              <a:t>ADB 协议修复</a:t>
-            </a:r>
-            <a:endParaRPr lang="en-US" sz="1600" dirty="0"/>
-          </a:p>
-        </p:txBody>
-      </p:sp>
-      <p:sp>
-        <p:nvSpPr>
-          <p:cNvPr id="10" name="Text 8"/>
-          <p:cNvSpPr/>
-          <p:nvPr/>
-        </p:nvSpPr>
-        <p:spPr>
-          <a:xfrm>
-            <a:off x="4389120" y="2194560"/>
-            <a:ext cx="6675120" cy="548640"/>
-          </a:xfrm>
-          <a:prstGeom prst="rect">
-            <a:avLst/>
-          </a:prstGeom>
-          <a:noFill/>
-          <a:ln/>
-        </p:spPr>
-        <p:txBody>
-          <a:bodyPr wrap="square" rtlCol="0" anchor="ctr"/>
-          <a:lstStyle/>
-          <a:p>
-            <a:pPr indent="0" marL="0">
-              <a:buNone/>
-            </a:pPr>
-            <a:r>
-              <a:rPr lang="en-US" sz="1300" dirty="0">
-                <a:solidFill>
-                  <a:srgbClr val="8A8780"/>
-                </a:solidFill>
-                <a:latin typeface="JetBrains Mono" pitchFamily="34" charset="0"/>
-                <a:ea typeface="JetBrains Mono" pitchFamily="34" charset="-122"/>
-                <a:cs typeface="JetBrains Mono" pitchFamily="34" charset="-120"/>
-              </a:rPr>
-              <a:t>修复 CLSE 误判 + 流关闭协议错误，文件上传不再回退慢速 shell</a:t>
-            </a:r>
-            <a:endParaRPr lang="en-US" sz="1300" dirty="0"/>
-          </a:p>
-        </p:txBody>
-      </p:sp>
-      <p:sp>
-        <p:nvSpPr>
-          <p:cNvPr id="11" name="Shape 9"/>
-          <p:cNvSpPr/>
-          <p:nvPr/>
-        </p:nvSpPr>
-        <p:spPr>
-          <a:xfrm>
-            <a:off x="731520" y="2834640"/>
-            <a:ext cx="10515600" cy="548640"/>
-          </a:xfrm>
-          <a:prstGeom prst="roundRect">
-            <a:avLst>
-              <a:gd name="adj" fmla="val 13333"/>
-            </a:avLst>
-          </a:prstGeom>
-          <a:solidFill>
-            <a:srgbClr val="151518"/>
-          </a:solidFill>
-          <a:ln w="25400">
+          <a:ln w="12700">
             <a:solidFill>
               <a:srgbClr val="5B8FB9"/>
             </a:solidFill>
@@ -5148,23 +4984,237 @@
       </p:sp>
       <p:sp>
         <p:nvSpPr>
-          <p:cNvPr id="12" name="Shape 10"/>
-          <p:cNvSpPr/>
-          <p:nvPr/>
-        </p:nvSpPr>
-        <p:spPr>
-          <a:xfrm>
-            <a:off x="1005840" y="2944368"/>
-            <a:ext cx="320040" cy="320040"/>
-          </a:xfrm>
-          <a:prstGeom prst="ellipse">
-            <a:avLst/>
-          </a:prstGeom>
-          <a:solidFill>
-            <a:srgbClr val="5B8FB9"/>
-          </a:solidFill>
-          <a:ln/>
-        </p:spPr>
+          <p:cNvPr id="7" name="Text 5"/>
+          <p:cNvSpPr/>
+          <p:nvPr/>
+        </p:nvSpPr>
+        <p:spPr>
+          <a:xfrm>
+            <a:off x="731520" y="2240280"/>
+            <a:ext cx="4572000" cy="365760"/>
+          </a:xfrm>
+          <a:prstGeom prst="rect">
+            <a:avLst/>
+          </a:prstGeom>
+          <a:noFill/>
+          <a:ln/>
+        </p:spPr>
+        <p:txBody>
+          <a:bodyPr wrap="square" rtlCol="0" anchor="ctr"/>
+          <a:lstStyle/>
+          <a:p>
+            <a:pPr indent="0" marL="0">
+              <a:buNone/>
+            </a:pPr>
+            <a:r>
+              <a:rPr lang="en-US" sz="1600" b="1" dirty="0">
+                <a:solidFill>
+                  <a:srgbClr val="5B8FB9"/>
+                </a:solidFill>
+                <a:latin typeface="JetBrains Mono" pitchFamily="34" charset="0"/>
+                <a:ea typeface="JetBrains Mono" pitchFamily="34" charset="-122"/>
+                <a:cs typeface="JetBrains Mono" pitchFamily="34" charset="-120"/>
+              </a:rPr>
+              <a:t>多语言支持 (i18n)</a:t>
+            </a:r>
+            <a:endParaRPr lang="en-US" sz="1600" dirty="0"/>
+          </a:p>
+        </p:txBody>
+      </p:sp>
+      <p:sp>
+        <p:nvSpPr>
+          <p:cNvPr id="8" name="Text 6"/>
+          <p:cNvSpPr/>
+          <p:nvPr/>
+        </p:nvSpPr>
+        <p:spPr>
+          <a:xfrm>
+            <a:off x="731520" y="2697480"/>
+            <a:ext cx="5029200" cy="310896"/>
+          </a:xfrm>
+          <a:prstGeom prst="rect">
+            <a:avLst/>
+          </a:prstGeom>
+          <a:noFill/>
+          <a:ln/>
+        </p:spPr>
+        <p:txBody>
+          <a:bodyPr wrap="square" rtlCol="0" anchor="ctr"/>
+          <a:lstStyle/>
+          <a:p>
+            <a:pPr indent="0" marL="0">
+              <a:buNone/>
+            </a:pPr>
+            <a:r>
+              <a:rPr lang="en-US" sz="1100" dirty="0">
+                <a:solidFill>
+                  <a:srgbClr val="8A8780"/>
+                </a:solidFill>
+                <a:latin typeface="JetBrains Mono" pitchFamily="34" charset="0"/>
+                <a:ea typeface="JetBrains Mono" pitchFamily="34" charset="-122"/>
+                <a:cs typeface="JetBrains Mono" pitchFamily="34" charset="-120"/>
+              </a:rPr>
+              <a:t>• 完整中英文支持（values/ + values-en/）</a:t>
+            </a:r>
+            <a:endParaRPr lang="en-US" sz="1100" dirty="0"/>
+          </a:p>
+        </p:txBody>
+      </p:sp>
+      <p:sp>
+        <p:nvSpPr>
+          <p:cNvPr id="9" name="Text 7"/>
+          <p:cNvSpPr/>
+          <p:nvPr/>
+        </p:nvSpPr>
+        <p:spPr>
+          <a:xfrm>
+            <a:off x="731520" y="3044952"/>
+            <a:ext cx="5029200" cy="310896"/>
+          </a:xfrm>
+          <a:prstGeom prst="rect">
+            <a:avLst/>
+          </a:prstGeom>
+          <a:noFill/>
+          <a:ln/>
+        </p:spPr>
+        <p:txBody>
+          <a:bodyPr wrap="square" rtlCol="0" anchor="ctr"/>
+          <a:lstStyle/>
+          <a:p>
+            <a:pPr indent="0" marL="0">
+              <a:buNone/>
+            </a:pPr>
+            <a:r>
+              <a:rPr lang="en-US" sz="1100" dirty="0">
+                <a:solidFill>
+                  <a:srgbClr val="8A8780"/>
+                </a:solidFill>
+                <a:latin typeface="JetBrains Mono" pitchFamily="34" charset="0"/>
+                <a:ea typeface="JetBrains Mono" pitchFamily="34" charset="-122"/>
+                <a:cs typeface="JetBrains Mono" pitchFamily="34" charset="-120"/>
+              </a:rPr>
+              <a:t>• 运行时语言切换，无需重启</a:t>
+            </a:r>
+            <a:endParaRPr lang="en-US" sz="1100" dirty="0"/>
+          </a:p>
+        </p:txBody>
+      </p:sp>
+      <p:sp>
+        <p:nvSpPr>
+          <p:cNvPr id="10" name="Text 8"/>
+          <p:cNvSpPr/>
+          <p:nvPr/>
+        </p:nvSpPr>
+        <p:spPr>
+          <a:xfrm>
+            <a:off x="731520" y="3392424"/>
+            <a:ext cx="5029200" cy="310896"/>
+          </a:xfrm>
+          <a:prstGeom prst="rect">
+            <a:avLst/>
+          </a:prstGeom>
+          <a:noFill/>
+          <a:ln/>
+        </p:spPr>
+        <p:txBody>
+          <a:bodyPr wrap="square" rtlCol="0" anchor="ctr"/>
+          <a:lstStyle/>
+          <a:p>
+            <a:pPr indent="0" marL="0">
+              <a:buNone/>
+            </a:pPr>
+            <a:r>
+              <a:rPr lang="en-US" sz="1100" dirty="0">
+                <a:solidFill>
+                  <a:srgbClr val="8A8780"/>
+                </a:solidFill>
+                <a:latin typeface="JetBrains Mono" pitchFamily="34" charset="0"/>
+                <a:ea typeface="JetBrains Mono" pitchFamily="34" charset="-122"/>
+                <a:cs typeface="JetBrains Mono" pitchFamily="34" charset="-120"/>
+              </a:rPr>
+              <a:t>• 首次启动自动检测系统语言</a:t>
+            </a:r>
+            <a:endParaRPr lang="en-US" sz="1100" dirty="0"/>
+          </a:p>
+        </p:txBody>
+      </p:sp>
+      <p:sp>
+        <p:nvSpPr>
+          <p:cNvPr id="11" name="Text 9"/>
+          <p:cNvSpPr/>
+          <p:nvPr/>
+        </p:nvSpPr>
+        <p:spPr>
+          <a:xfrm>
+            <a:off x="731520" y="3739896"/>
+            <a:ext cx="5029200" cy="310896"/>
+          </a:xfrm>
+          <a:prstGeom prst="rect">
+            <a:avLst/>
+          </a:prstGeom>
+          <a:noFill/>
+          <a:ln/>
+        </p:spPr>
+        <p:txBody>
+          <a:bodyPr wrap="square" rtlCol="0" anchor="ctr"/>
+          <a:lstStyle/>
+          <a:p>
+            <a:pPr indent="0" marL="0">
+              <a:buNone/>
+            </a:pPr>
+            <a:r>
+              <a:rPr lang="en-US" sz="1100" dirty="0">
+                <a:solidFill>
+                  <a:srgbClr val="8A8780"/>
+                </a:solidFill>
+                <a:latin typeface="JetBrains Mono" pitchFamily="34" charset="0"/>
+                <a:ea typeface="JetBrains Mono" pitchFamily="34" charset="-122"/>
+                <a:cs typeface="JetBrains Mono" pitchFamily="34" charset="-120"/>
+              </a:rPr>
+              <a:t>• Crowdin 云端翻译管理</a:t>
+            </a:r>
+            <a:endParaRPr lang="en-US" sz="1100" dirty="0"/>
+          </a:p>
+        </p:txBody>
+      </p:sp>
+      <p:sp>
+        <p:nvSpPr>
+          <p:cNvPr id="12" name="Text 10"/>
+          <p:cNvSpPr/>
+          <p:nvPr/>
+        </p:nvSpPr>
+        <p:spPr>
+          <a:xfrm>
+            <a:off x="731520" y="4087368"/>
+            <a:ext cx="5029200" cy="310896"/>
+          </a:xfrm>
+          <a:prstGeom prst="rect">
+            <a:avLst/>
+          </a:prstGeom>
+          <a:noFill/>
+          <a:ln/>
+        </p:spPr>
+        <p:txBody>
+          <a:bodyPr wrap="square" rtlCol="0" anchor="ctr"/>
+          <a:lstStyle/>
+          <a:p>
+            <a:pPr indent="0" marL="0">
+              <a:buNone/>
+            </a:pPr>
+            <a:r>
+              <a:rPr lang="en-US" sz="1100" dirty="0">
+                <a:solidFill>
+                  <a:srgbClr val="8A8780"/>
+                </a:solidFill>
+                <a:latin typeface="JetBrains Mono" pitchFamily="34" charset="0"/>
+                <a:ea typeface="JetBrains Mono" pitchFamily="34" charset="-122"/>
+                <a:cs typeface="JetBrains Mono" pitchFamily="34" charset="-120"/>
+              </a:rPr>
+              <a:t>• 所有 UI 文字通过 R.string 引用</a:t>
+            </a:r>
+            <a:endParaRPr lang="en-US" sz="1100" dirty="0"/>
+          </a:p>
+        </p:txBody>
       </p:sp>
       <p:sp>
         <p:nvSpPr>
@@ -5174,34 +5224,34 @@
         </p:nvSpPr>
         <p:spPr>
           <a:xfrm>
-            <a:off x="1005840" y="2944368"/>
-            <a:ext cx="320040" cy="320040"/>
-          </a:xfrm>
-          <a:prstGeom prst="rect">
-            <a:avLst/>
-          </a:prstGeom>
-          <a:noFill/>
-          <a:ln/>
-        </p:spPr>
-        <p:txBody>
-          <a:bodyPr wrap="square" rtlCol="0" anchor="ctr"/>
-          <a:lstStyle/>
-          <a:p>
-            <a:pPr algn="ctr" indent="0" marL="0">
-              <a:buNone/>
-            </a:pPr>
-            <a:r>
-              <a:rPr lang="en-US" sz="1400" b="1" dirty="0">
-                <a:solidFill>
-                  <a:srgbClr val="0B0B0E"/>
-                </a:solidFill>
-                <a:latin typeface="JetBrains Mono" pitchFamily="34" charset="0"/>
-                <a:ea typeface="JetBrains Mono" pitchFamily="34" charset="-122"/>
-                <a:cs typeface="JetBrains Mono" pitchFamily="34" charset="-120"/>
-              </a:rPr>
-              <a:t>2</a:t>
-            </a:r>
-            <a:endParaRPr lang="en-US" sz="1400" dirty="0"/>
+            <a:off x="731520" y="4434840"/>
+            <a:ext cx="5029200" cy="310896"/>
+          </a:xfrm>
+          <a:prstGeom prst="rect">
+            <a:avLst/>
+          </a:prstGeom>
+          <a:noFill/>
+          <a:ln/>
+        </p:spPr>
+        <p:txBody>
+          <a:bodyPr wrap="square" rtlCol="0" anchor="ctr"/>
+          <a:lstStyle/>
+          <a:p>
+            <a:pPr indent="0" marL="0">
+              <a:buNone/>
+            </a:pPr>
+            <a:r>
+              <a:rPr lang="en-US" sz="1100" dirty="0">
+                <a:solidFill>
+                  <a:srgbClr val="8A8780"/>
+                </a:solidFill>
+                <a:latin typeface="JetBrains Mono" pitchFamily="34" charset="0"/>
+                <a:ea typeface="JetBrains Mono" pitchFamily="34" charset="-122"/>
+                <a:cs typeface="JetBrains Mono" pitchFamily="34" charset="-120"/>
+              </a:rPr>
+              <a:t>• 底部导航标签随语言切换</a:t>
+            </a:r>
+            <a:endParaRPr lang="en-US" sz="1100" dirty="0"/>
           </a:p>
         </p:txBody>
       </p:sp>
@@ -5213,63 +5263,24 @@
         </p:nvSpPr>
         <p:spPr>
           <a:xfrm>
-            <a:off x="1554480" y="2834640"/>
-            <a:ext cx="2743200" cy="548640"/>
-          </a:xfrm>
-          <a:prstGeom prst="rect">
-            <a:avLst/>
-          </a:prstGeom>
-          <a:noFill/>
-          <a:ln/>
-        </p:spPr>
-        <p:txBody>
-          <a:bodyPr wrap="square" rtlCol="0" anchor="ctr"/>
-          <a:lstStyle/>
-          <a:p>
-            <a:pPr indent="0" marL="0">
-              <a:buNone/>
-            </a:pPr>
-            <a:r>
-              <a:rPr lang="en-US" sz="1600" b="1" dirty="0">
-                <a:solidFill>
-                  <a:srgbClr val="F2EFEA"/>
-                </a:solidFill>
-                <a:latin typeface="JetBrains Mono" pitchFamily="34" charset="0"/>
-                <a:ea typeface="JetBrains Mono" pitchFamily="34" charset="-122"/>
-                <a:cs typeface="JetBrains Mono" pitchFamily="34" charset="-120"/>
-              </a:rPr>
-              <a:t>眼镜长按修复</a:t>
-            </a:r>
-            <a:endParaRPr lang="en-US" sz="1600" dirty="0"/>
-          </a:p>
-        </p:txBody>
-      </p:sp>
-      <p:sp>
-        <p:nvSpPr>
-          <p:cNvPr id="15" name="Text 13"/>
-          <p:cNvSpPr/>
-          <p:nvPr/>
-        </p:nvSpPr>
-        <p:spPr>
-          <a:xfrm>
-            <a:off x="4389120" y="2834640"/>
-            <a:ext cx="6675120" cy="548640"/>
-          </a:xfrm>
-          <a:prstGeom prst="rect">
-            <a:avLst/>
-          </a:prstGeom>
-          <a:noFill/>
-          <a:ln/>
-        </p:spPr>
-        <p:txBody>
-          <a:bodyPr wrap="square" rtlCol="0" anchor="ctr"/>
-          <a:lstStyle/>
-          <a:p>
-            <a:pPr indent="0" marL="0">
-              <a:buNone/>
-            </a:pPr>
-            <a:r>
-              <a:rPr lang="en-US" sz="1300" dirty="0">
+            <a:off x="731520" y="4782312"/>
+            <a:ext cx="5029200" cy="310896"/>
+          </a:xfrm>
+          <a:prstGeom prst="rect">
+            <a:avLst/>
+          </a:prstGeom>
+          <a:noFill/>
+          <a:ln/>
+        </p:spPr>
+        <p:txBody>
+          <a:bodyPr wrap="square" rtlCol="0" anchor="ctr"/>
+          <a:lstStyle/>
+          <a:p>
+            <a:pPr indent="0" marL="0">
+              <a:buNone/>
+            </a:pPr>
+            <a:r>
+              <a:rPr lang="en-US" sz="1100" dirty="0">
                 <a:solidFill>
                   <a:srgbClr val="8A8780"/>
                 </a:solidFill>
@@ -5277,34 +5288,34 @@
                 <a:ea typeface="JetBrains Mono" pitchFamily="34" charset="-122"/>
                 <a:cs typeface="JetBrains Mono" pitchFamily="34" charset="-120"/>
               </a:rPr>
-              <a:t>修复忽略 LONG_PRESS 广播 + 启动兜底命令行支持非标准 Activity</a:t>
-            </a:r>
-            <a:endParaRPr lang="en-US" sz="1300" dirty="0"/>
-          </a:p>
-        </p:txBody>
-      </p:sp>
-      <p:sp>
-        <p:nvSpPr>
-          <p:cNvPr id="16" name="Shape 14"/>
-          <p:cNvSpPr/>
-          <p:nvPr/>
-        </p:nvSpPr>
-        <p:spPr>
-          <a:xfrm>
-            <a:off x="731520" y="3474720"/>
-            <a:ext cx="10515600" cy="548640"/>
+              <a:t>• 22 种分类标签中英文本地化</a:t>
+            </a:r>
+            <a:endParaRPr lang="en-US" sz="1100" dirty="0"/>
+          </a:p>
+        </p:txBody>
+      </p:sp>
+      <p:sp>
+        <p:nvSpPr>
+          <p:cNvPr id="15" name="Shape 13"/>
+          <p:cNvSpPr/>
+          <p:nvPr/>
+        </p:nvSpPr>
+        <p:spPr>
+          <a:xfrm>
+            <a:off x="6217920" y="2103120"/>
+            <a:ext cx="5486400" cy="3931920"/>
           </a:xfrm>
           <a:prstGeom prst="roundRect">
             <a:avLst>
-              <a:gd name="adj" fmla="val 13333"/>
+              <a:gd name="adj" fmla="val 2791"/>
             </a:avLst>
           </a:prstGeom>
           <a:solidFill>
             <a:srgbClr val="151518"/>
           </a:solidFill>
-          <a:ln w="25400">
+          <a:ln w="12700">
             <a:solidFill>
-              <a:srgbClr val="D4A85C"/>
+              <a:srgbClr val="7D7A70"/>
             </a:solidFill>
             <a:prstDash val="solid"/>
           </a:ln>
@@ -5312,23 +5323,81 @@
       </p:sp>
       <p:sp>
         <p:nvSpPr>
-          <p:cNvPr id="17" name="Shape 15"/>
-          <p:cNvSpPr/>
-          <p:nvPr/>
-        </p:nvSpPr>
-        <p:spPr>
-          <a:xfrm>
-            <a:off x="1005840" y="3584448"/>
-            <a:ext cx="320040" cy="320040"/>
-          </a:xfrm>
-          <a:prstGeom prst="ellipse">
-            <a:avLst/>
-          </a:prstGeom>
-          <a:solidFill>
-            <a:srgbClr val="D4A85C"/>
-          </a:solidFill>
-          <a:ln/>
-        </p:spPr>
+          <p:cNvPr id="16" name="Text 14"/>
+          <p:cNvSpPr/>
+          <p:nvPr/>
+        </p:nvSpPr>
+        <p:spPr>
+          <a:xfrm>
+            <a:off x="6492240" y="2240280"/>
+            <a:ext cx="4572000" cy="365760"/>
+          </a:xfrm>
+          <a:prstGeom prst="rect">
+            <a:avLst/>
+          </a:prstGeom>
+          <a:noFill/>
+          <a:ln/>
+        </p:spPr>
+        <p:txBody>
+          <a:bodyPr wrap="square" rtlCol="0" anchor="ctr"/>
+          <a:lstStyle/>
+          <a:p>
+            <a:pPr indent="0" marL="0">
+              <a:buNone/>
+            </a:pPr>
+            <a:r>
+              <a:rPr lang="en-US" sz="1600" b="1" dirty="0">
+                <a:solidFill>
+                  <a:srgbClr val="7D7A70"/>
+                </a:solidFill>
+                <a:latin typeface="JetBrains Mono" pitchFamily="34" charset="0"/>
+                <a:ea typeface="JetBrains Mono" pitchFamily="34" charset="-122"/>
+                <a:cs typeface="JetBrains Mono" pitchFamily="34" charset="-120"/>
+              </a:rPr>
+              <a:t>设置 &amp; 配置</a:t>
+            </a:r>
+            <a:endParaRPr lang="en-US" sz="1600" dirty="0"/>
+          </a:p>
+        </p:txBody>
+      </p:sp>
+      <p:sp>
+        <p:nvSpPr>
+          <p:cNvPr id="17" name="Text 15"/>
+          <p:cNvSpPr/>
+          <p:nvPr/>
+        </p:nvSpPr>
+        <p:spPr>
+          <a:xfrm>
+            <a:off x="6492240" y="2697480"/>
+            <a:ext cx="5029200" cy="310896"/>
+          </a:xfrm>
+          <a:prstGeom prst="rect">
+            <a:avLst/>
+          </a:prstGeom>
+          <a:noFill/>
+          <a:ln/>
+        </p:spPr>
+        <p:txBody>
+          <a:bodyPr wrap="square" rtlCol="0" anchor="ctr"/>
+          <a:lstStyle/>
+          <a:p>
+            <a:pPr indent="0" marL="0">
+              <a:buNone/>
+            </a:pPr>
+            <a:r>
+              <a:rPr lang="en-US" sz="1100" dirty="0">
+                <a:solidFill>
+                  <a:srgbClr val="8A8780"/>
+                </a:solidFill>
+                <a:latin typeface="JetBrains Mono" pitchFamily="34" charset="0"/>
+                <a:ea typeface="JetBrains Mono" pitchFamily="34" charset="-122"/>
+                <a:cs typeface="JetBrains Mono" pitchFamily="34" charset="-120"/>
+              </a:rPr>
+              <a:t>• 双主题切换（丝绒炭黑 + 冰蓝冰川）</a:t>
+            </a:r>
+            <a:endParaRPr lang="en-US" sz="1100" dirty="0"/>
+          </a:p>
+        </p:txBody>
       </p:sp>
       <p:sp>
         <p:nvSpPr>
@@ -5338,34 +5407,34 @@
         </p:nvSpPr>
         <p:spPr>
           <a:xfrm>
-            <a:off x="1005840" y="3584448"/>
-            <a:ext cx="320040" cy="320040"/>
-          </a:xfrm>
-          <a:prstGeom prst="rect">
-            <a:avLst/>
-          </a:prstGeom>
-          <a:noFill/>
-          <a:ln/>
-        </p:spPr>
-        <p:txBody>
-          <a:bodyPr wrap="square" rtlCol="0" anchor="ctr"/>
-          <a:lstStyle/>
-          <a:p>
-            <a:pPr algn="ctr" indent="0" marL="0">
-              <a:buNone/>
-            </a:pPr>
-            <a:r>
-              <a:rPr lang="en-US" sz="1400" b="1" dirty="0">
-                <a:solidFill>
-                  <a:srgbClr val="0B0B0E"/>
-                </a:solidFill>
-                <a:latin typeface="JetBrains Mono" pitchFamily="34" charset="0"/>
-                <a:ea typeface="JetBrains Mono" pitchFamily="34" charset="-122"/>
-                <a:cs typeface="JetBrains Mono" pitchFamily="34" charset="-120"/>
-              </a:rPr>
-              <a:t>3</a:t>
-            </a:r>
-            <a:endParaRPr lang="en-US" sz="1400" dirty="0"/>
+            <a:off x="6492240" y="3044952"/>
+            <a:ext cx="5029200" cy="310896"/>
+          </a:xfrm>
+          <a:prstGeom prst="rect">
+            <a:avLst/>
+          </a:prstGeom>
+          <a:noFill/>
+          <a:ln/>
+        </p:spPr>
+        <p:txBody>
+          <a:bodyPr wrap="square" rtlCol="0" anchor="ctr"/>
+          <a:lstStyle/>
+          <a:p>
+            <a:pPr indent="0" marL="0">
+              <a:buNone/>
+            </a:pPr>
+            <a:r>
+              <a:rPr lang="en-US" sz="1100" dirty="0">
+                <a:solidFill>
+                  <a:srgbClr val="8A8780"/>
+                </a:solidFill>
+                <a:latin typeface="JetBrains Mono" pitchFamily="34" charset="0"/>
+                <a:ea typeface="JetBrains Mono" pitchFamily="34" charset="-122"/>
+                <a:cs typeface="JetBrains Mono" pitchFamily="34" charset="-120"/>
+              </a:rPr>
+              <a:t>• 商店源切换（Gitee / GitHub）</a:t>
+            </a:r>
+            <a:endParaRPr lang="en-US" sz="1100" dirty="0"/>
           </a:p>
         </p:txBody>
       </p:sp>
@@ -5377,34 +5446,34 @@
         </p:nvSpPr>
         <p:spPr>
           <a:xfrm>
-            <a:off x="1554480" y="3474720"/>
-            <a:ext cx="2743200" cy="548640"/>
-          </a:xfrm>
-          <a:prstGeom prst="rect">
-            <a:avLst/>
-          </a:prstGeom>
-          <a:noFill/>
-          <a:ln/>
-        </p:spPr>
-        <p:txBody>
-          <a:bodyPr wrap="square" rtlCol="0" anchor="ctr"/>
-          <a:lstStyle/>
-          <a:p>
-            <a:pPr indent="0" marL="0">
-              <a:buNone/>
-            </a:pPr>
-            <a:r>
-              <a:rPr lang="en-US" sz="1600" b="1" dirty="0">
-                <a:solidFill>
-                  <a:srgbClr val="F2EFEA"/>
-                </a:solidFill>
-                <a:latin typeface="JetBrains Mono" pitchFamily="34" charset="0"/>
-                <a:ea typeface="JetBrains Mono" pitchFamily="34" charset="-122"/>
-                <a:cs typeface="JetBrains Mono" pitchFamily="34" charset="-120"/>
-              </a:rPr>
-              <a:t>按键持久性</a:t>
-            </a:r>
-            <a:endParaRPr lang="en-US" sz="1600" dirty="0"/>
+            <a:off x="6492240" y="3392424"/>
+            <a:ext cx="5029200" cy="310896"/>
+          </a:xfrm>
+          <a:prstGeom prst="rect">
+            <a:avLst/>
+          </a:prstGeom>
+          <a:noFill/>
+          <a:ln/>
+        </p:spPr>
+        <p:txBody>
+          <a:bodyPr wrap="square" rtlCol="0" anchor="ctr"/>
+          <a:lstStyle/>
+          <a:p>
+            <a:pPr indent="0" marL="0">
+              <a:buNone/>
+            </a:pPr>
+            <a:r>
+              <a:rPr lang="en-US" sz="1100" dirty="0">
+                <a:solidFill>
+                  <a:srgbClr val="8A8780"/>
+                </a:solidFill>
+                <a:latin typeface="JetBrains Mono" pitchFamily="34" charset="0"/>
+                <a:ea typeface="JetBrains Mono" pitchFamily="34" charset="-122"/>
+                <a:cs typeface="JetBrains Mono" pitchFamily="34" charset="-120"/>
+              </a:rPr>
+              <a:t>• 眼镜端 RokidLink 服务管理</a:t>
+            </a:r>
+            <a:endParaRPr lang="en-US" sz="1100" dirty="0"/>
           </a:p>
         </p:txBody>
       </p:sp>
@@ -5416,24 +5485,24 @@
         </p:nvSpPr>
         <p:spPr>
           <a:xfrm>
-            <a:off x="4389120" y="3474720"/>
-            <a:ext cx="6675120" cy="548640"/>
-          </a:xfrm>
-          <a:prstGeom prst="rect">
-            <a:avLst/>
-          </a:prstGeom>
-          <a:noFill/>
-          <a:ln/>
-        </p:spPr>
-        <p:txBody>
-          <a:bodyPr wrap="square" rtlCol="0" anchor="ctr"/>
-          <a:lstStyle/>
-          <a:p>
-            <a:pPr indent="0" marL="0">
-              <a:buNone/>
-            </a:pPr>
-            <a:r>
-              <a:rPr lang="en-US" sz="1300" dirty="0">
+            <a:off x="6492240" y="3739896"/>
+            <a:ext cx="5029200" cy="310896"/>
+          </a:xfrm>
+          <a:prstGeom prst="rect">
+            <a:avLst/>
+          </a:prstGeom>
+          <a:noFill/>
+          <a:ln/>
+        </p:spPr>
+        <p:txBody>
+          <a:bodyPr wrap="square" rtlCol="0" anchor="ctr"/>
+          <a:lstStyle/>
+          <a:p>
+            <a:pPr indent="0" marL="0">
+              <a:buNone/>
+            </a:pPr>
+            <a:r>
+              <a:rPr lang="en-US" sz="1100" dirty="0">
                 <a:solidFill>
                   <a:srgbClr val="8A8780"/>
                 </a:solidFill>
@@ -5441,58 +5510,89 @@
                 <a:ea typeface="JetBrains Mono" pitchFamily="34" charset="-122"/>
                 <a:cs typeface="JetBrains Mono" pitchFamily="34" charset="-120"/>
               </a:rPr>
-              <a:t>WakeLock + SCREEN_ON + 心跳自检，按键不再过一会失效</a:t>
-            </a:r>
-            <a:endParaRPr lang="en-US" sz="1300" dirty="0"/>
-          </a:p>
-        </p:txBody>
-      </p:sp>
-      <p:sp>
-        <p:nvSpPr>
-          <p:cNvPr id="21" name="Shape 19"/>
-          <p:cNvSpPr/>
-          <p:nvPr/>
-        </p:nvSpPr>
-        <p:spPr>
-          <a:xfrm>
-            <a:off x="731520" y="4114800"/>
-            <a:ext cx="10515600" cy="548640"/>
-          </a:xfrm>
-          <a:prstGeom prst="roundRect">
-            <a:avLst>
-              <a:gd name="adj" fmla="val 13333"/>
-            </a:avLst>
-          </a:prstGeom>
-          <a:solidFill>
-            <a:srgbClr val="151518"/>
-          </a:solidFill>
-          <a:ln w="25400">
-            <a:solidFill>
-              <a:srgbClr val="A78BFA"/>
-            </a:solidFill>
-            <a:prstDash val="solid"/>
-          </a:ln>
-        </p:spPr>
-      </p:sp>
-      <p:sp>
-        <p:nvSpPr>
-          <p:cNvPr id="22" name="Shape 20"/>
-          <p:cNvSpPr/>
-          <p:nvPr/>
-        </p:nvSpPr>
-        <p:spPr>
-          <a:xfrm>
-            <a:off x="1005840" y="4224528"/>
-            <a:ext cx="320040" cy="320040"/>
-          </a:xfrm>
-          <a:prstGeom prst="ellipse">
-            <a:avLst/>
-          </a:prstGeom>
-          <a:solidFill>
-            <a:srgbClr val="A78BFA"/>
-          </a:solidFill>
-          <a:ln/>
-        </p:spPr>
+              <a:t>• 应用版本检查与更新</a:t>
+            </a:r>
+            <a:endParaRPr lang="en-US" sz="1100" dirty="0"/>
+          </a:p>
+        </p:txBody>
+      </p:sp>
+      <p:sp>
+        <p:nvSpPr>
+          <p:cNvPr id="21" name="Text 19"/>
+          <p:cNvSpPr/>
+          <p:nvPr/>
+        </p:nvSpPr>
+        <p:spPr>
+          <a:xfrm>
+            <a:off x="6492240" y="4087368"/>
+            <a:ext cx="5029200" cy="310896"/>
+          </a:xfrm>
+          <a:prstGeom prst="rect">
+            <a:avLst/>
+          </a:prstGeom>
+          <a:noFill/>
+          <a:ln/>
+        </p:spPr>
+        <p:txBody>
+          <a:bodyPr wrap="square" rtlCol="0" anchor="ctr"/>
+          <a:lstStyle/>
+          <a:p>
+            <a:pPr indent="0" marL="0">
+              <a:buNone/>
+            </a:pPr>
+            <a:r>
+              <a:rPr lang="en-US" sz="1100" dirty="0">
+                <a:solidFill>
+                  <a:srgbClr val="8A8780"/>
+                </a:solidFill>
+                <a:latin typeface="JetBrains Mono" pitchFamily="34" charset="0"/>
+                <a:ea typeface="JetBrains Mono" pitchFamily="34" charset="-122"/>
+                <a:cs typeface="JetBrains Mono" pitchFamily="34" charset="-120"/>
+              </a:rPr>
+              <a:t>• 主机应用选择与引导</a:t>
+            </a:r>
+            <a:endParaRPr lang="en-US" sz="1100" dirty="0"/>
+          </a:p>
+        </p:txBody>
+      </p:sp>
+      <p:sp>
+        <p:nvSpPr>
+          <p:cNvPr id="22" name="Text 20"/>
+          <p:cNvSpPr/>
+          <p:nvPr/>
+        </p:nvSpPr>
+        <p:spPr>
+          <a:xfrm>
+            <a:off x="6492240" y="4434840"/>
+            <a:ext cx="5029200" cy="310896"/>
+          </a:xfrm>
+          <a:prstGeom prst="rect">
+            <a:avLst/>
+          </a:prstGeom>
+          <a:noFill/>
+          <a:ln/>
+        </p:spPr>
+        <p:txBody>
+          <a:bodyPr wrap="square" rtlCol="0" anchor="ctr"/>
+          <a:lstStyle/>
+          <a:p>
+            <a:pPr indent="0" marL="0">
+              <a:buNone/>
+            </a:pPr>
+            <a:r>
+              <a:rPr lang="en-US" sz="1100" dirty="0">
+                <a:solidFill>
+                  <a:srgbClr val="8A8780"/>
+                </a:solidFill>
+                <a:latin typeface="JetBrains Mono" pitchFamily="34" charset="0"/>
+                <a:ea typeface="JetBrains Mono" pitchFamily="34" charset="-122"/>
+                <a:cs typeface="JetBrains Mono" pitchFamily="34" charset="-120"/>
+              </a:rPr>
+              <a:t>• 自定义按键映射配置</a:t>
+            </a:r>
+            <a:endParaRPr lang="en-US" sz="1100" dirty="0"/>
+          </a:p>
+        </p:txBody>
       </p:sp>
       <p:sp>
         <p:nvSpPr>
@@ -5502,446 +5602,40 @@
         </p:nvSpPr>
         <p:spPr>
           <a:xfrm>
-            <a:off x="1005840" y="4224528"/>
-            <a:ext cx="320040" cy="320040"/>
-          </a:xfrm>
-          <a:prstGeom prst="rect">
-            <a:avLst/>
-          </a:prstGeom>
-          <a:noFill/>
-          <a:ln/>
-        </p:spPr>
-        <p:txBody>
-          <a:bodyPr wrap="square" rtlCol="0" anchor="ctr"/>
-          <a:lstStyle/>
-          <a:p>
-            <a:pPr algn="ctr" indent="0" marL="0">
-              <a:buNone/>
-            </a:pPr>
-            <a:r>
-              <a:rPr lang="en-US" sz="1400" b="1" dirty="0">
-                <a:solidFill>
-                  <a:srgbClr val="0B0B0E"/>
-                </a:solidFill>
-                <a:latin typeface="JetBrains Mono" pitchFamily="34" charset="0"/>
-                <a:ea typeface="JetBrains Mono" pitchFamily="34" charset="-122"/>
-                <a:cs typeface="JetBrains Mono" pitchFamily="34" charset="-120"/>
-              </a:rPr>
-              <a:t>4</a:t>
-            </a:r>
-            <a:endParaRPr lang="en-US" sz="1400" dirty="0"/>
+            <a:off x="6492240" y="4782312"/>
+            <a:ext cx="5029200" cy="310896"/>
+          </a:xfrm>
+          <a:prstGeom prst="rect">
+            <a:avLst/>
+          </a:prstGeom>
+          <a:noFill/>
+          <a:ln/>
+        </p:spPr>
+        <p:txBody>
+          <a:bodyPr wrap="square" rtlCol="0" anchor="ctr"/>
+          <a:lstStyle/>
+          <a:p>
+            <a:pPr indent="0" marL="0">
+              <a:buNone/>
+            </a:pPr>
+            <a:r>
+              <a:rPr lang="en-US" sz="1100" dirty="0">
+                <a:solidFill>
+                  <a:srgbClr val="8A8780"/>
+                </a:solidFill>
+                <a:latin typeface="JetBrains Mono" pitchFamily="34" charset="0"/>
+                <a:ea typeface="JetBrains Mono" pitchFamily="34" charset="-122"/>
+                <a:cs typeface="JetBrains Mono" pitchFamily="34" charset="-120"/>
+              </a:rPr>
+              <a:t>• 系统日志面板（实时调试）</a:t>
+            </a:r>
+            <a:endParaRPr lang="en-US" sz="1100" dirty="0"/>
           </a:p>
         </p:txBody>
       </p:sp>
       <p:sp>
         <p:nvSpPr>
           <p:cNvPr id="24" name="Text 22"/>
-          <p:cNvSpPr/>
-          <p:nvPr/>
-        </p:nvSpPr>
-        <p:spPr>
-          <a:xfrm>
-            <a:off x="1554480" y="4114800"/>
-            <a:ext cx="2743200" cy="548640"/>
-          </a:xfrm>
-          <a:prstGeom prst="rect">
-            <a:avLst/>
-          </a:prstGeom>
-          <a:noFill/>
-          <a:ln/>
-        </p:spPr>
-        <p:txBody>
-          <a:bodyPr wrap="square" rtlCol="0" anchor="ctr"/>
-          <a:lstStyle/>
-          <a:p>
-            <a:pPr indent="0" marL="0">
-              <a:buNone/>
-            </a:pPr>
-            <a:r>
-              <a:rPr lang="en-US" sz="1600" b="1" dirty="0">
-                <a:solidFill>
-                  <a:srgbClr val="F2EFEA"/>
-                </a:solidFill>
-                <a:latin typeface="JetBrains Mono" pitchFamily="34" charset="0"/>
-                <a:ea typeface="JetBrains Mono" pitchFamily="34" charset="-122"/>
-                <a:cs typeface="JetBrains Mono" pitchFamily="34" charset="-120"/>
-              </a:rPr>
-              <a:t>按键设置 UI</a:t>
-            </a:r>
-            <a:endParaRPr lang="en-US" sz="1600" dirty="0"/>
-          </a:p>
-        </p:txBody>
-      </p:sp>
-      <p:sp>
-        <p:nvSpPr>
-          <p:cNvPr id="25" name="Text 23"/>
-          <p:cNvSpPr/>
-          <p:nvPr/>
-        </p:nvSpPr>
-        <p:spPr>
-          <a:xfrm>
-            <a:off x="4389120" y="4114800"/>
-            <a:ext cx="6675120" cy="548640"/>
-          </a:xfrm>
-          <a:prstGeom prst="rect">
-            <a:avLst/>
-          </a:prstGeom>
-          <a:noFill/>
-          <a:ln/>
-        </p:spPr>
-        <p:txBody>
-          <a:bodyPr wrap="square" rtlCol="0" anchor="ctr"/>
-          <a:lstStyle/>
-          <a:p>
-            <a:pPr indent="0" marL="0">
-              <a:buNone/>
-            </a:pPr>
-            <a:r>
-              <a:rPr lang="en-US" sz="1300" dirty="0">
-                <a:solidFill>
-                  <a:srgbClr val="8A8780"/>
-                </a:solidFill>
-                <a:latin typeface="JetBrains Mono" pitchFamily="34" charset="0"/>
-                <a:ea typeface="JetBrains Mono" pitchFamily="34" charset="-122"/>
-                <a:cs typeface="JetBrains Mono" pitchFamily="34" charset="-120"/>
-              </a:rPr>
-              <a:t>第三方应用改为下拉列表，长列表可滚动</a:t>
-            </a:r>
-            <a:endParaRPr lang="en-US" sz="1300" dirty="0"/>
-          </a:p>
-        </p:txBody>
-      </p:sp>
-      <p:sp>
-        <p:nvSpPr>
-          <p:cNvPr id="26" name="Shape 24"/>
-          <p:cNvSpPr/>
-          <p:nvPr/>
-        </p:nvSpPr>
-        <p:spPr>
-          <a:xfrm>
-            <a:off x="731520" y="4754880"/>
-            <a:ext cx="10515600" cy="548640"/>
-          </a:xfrm>
-          <a:prstGeom prst="roundRect">
-            <a:avLst>
-              <a:gd name="adj" fmla="val 13333"/>
-            </a:avLst>
-          </a:prstGeom>
-          <a:solidFill>
-            <a:srgbClr val="151518"/>
-          </a:solidFill>
-          <a:ln w="25400">
-            <a:solidFill>
-              <a:srgbClr val="00CEC9"/>
-            </a:solidFill>
-            <a:prstDash val="solid"/>
-          </a:ln>
-        </p:spPr>
-      </p:sp>
-      <p:sp>
-        <p:nvSpPr>
-          <p:cNvPr id="27" name="Shape 25"/>
-          <p:cNvSpPr/>
-          <p:nvPr/>
-        </p:nvSpPr>
-        <p:spPr>
-          <a:xfrm>
-            <a:off x="1005840" y="4864608"/>
-            <a:ext cx="320040" cy="320040"/>
-          </a:xfrm>
-          <a:prstGeom prst="ellipse">
-            <a:avLst/>
-          </a:prstGeom>
-          <a:solidFill>
-            <a:srgbClr val="00CEC9"/>
-          </a:solidFill>
-          <a:ln/>
-        </p:spPr>
-      </p:sp>
-      <p:sp>
-        <p:nvSpPr>
-          <p:cNvPr id="28" name="Text 26"/>
-          <p:cNvSpPr/>
-          <p:nvPr/>
-        </p:nvSpPr>
-        <p:spPr>
-          <a:xfrm>
-            <a:off x="1005840" y="4864608"/>
-            <a:ext cx="320040" cy="320040"/>
-          </a:xfrm>
-          <a:prstGeom prst="rect">
-            <a:avLst/>
-          </a:prstGeom>
-          <a:noFill/>
-          <a:ln/>
-        </p:spPr>
-        <p:txBody>
-          <a:bodyPr wrap="square" rtlCol="0" anchor="ctr"/>
-          <a:lstStyle/>
-          <a:p>
-            <a:pPr algn="ctr" indent="0" marL="0">
-              <a:buNone/>
-            </a:pPr>
-            <a:r>
-              <a:rPr lang="en-US" sz="1400" b="1" dirty="0">
-                <a:solidFill>
-                  <a:srgbClr val="0B0B0E"/>
-                </a:solidFill>
-                <a:latin typeface="JetBrains Mono" pitchFamily="34" charset="0"/>
-                <a:ea typeface="JetBrains Mono" pitchFamily="34" charset="-122"/>
-                <a:cs typeface="JetBrains Mono" pitchFamily="34" charset="-120"/>
-              </a:rPr>
-              <a:t>5</a:t>
-            </a:r>
-            <a:endParaRPr lang="en-US" sz="1400" dirty="0"/>
-          </a:p>
-        </p:txBody>
-      </p:sp>
-      <p:sp>
-        <p:nvSpPr>
-          <p:cNvPr id="29" name="Text 27"/>
-          <p:cNvSpPr/>
-          <p:nvPr/>
-        </p:nvSpPr>
-        <p:spPr>
-          <a:xfrm>
-            <a:off x="1554480" y="4754880"/>
-            <a:ext cx="2743200" cy="548640"/>
-          </a:xfrm>
-          <a:prstGeom prst="rect">
-            <a:avLst/>
-          </a:prstGeom>
-          <a:noFill/>
-          <a:ln/>
-        </p:spPr>
-        <p:txBody>
-          <a:bodyPr wrap="square" rtlCol="0" anchor="ctr"/>
-          <a:lstStyle/>
-          <a:p>
-            <a:pPr indent="0" marL="0">
-              <a:buNone/>
-            </a:pPr>
-            <a:r>
-              <a:rPr lang="en-US" sz="1600" b="1" dirty="0">
-                <a:solidFill>
-                  <a:srgbClr val="F2EFEA"/>
-                </a:solidFill>
-                <a:latin typeface="JetBrains Mono" pitchFamily="34" charset="0"/>
-                <a:ea typeface="JetBrains Mono" pitchFamily="34" charset="-122"/>
-                <a:cs typeface="JetBrains Mono" pitchFamily="34" charset="-120"/>
-              </a:rPr>
-              <a:t>应用商店</a:t>
-            </a:r>
-            <a:endParaRPr lang="en-US" sz="1600" dirty="0"/>
-          </a:p>
-        </p:txBody>
-      </p:sp>
-      <p:sp>
-        <p:nvSpPr>
-          <p:cNvPr id="30" name="Text 28"/>
-          <p:cNvSpPr/>
-          <p:nvPr/>
-        </p:nvSpPr>
-        <p:spPr>
-          <a:xfrm>
-            <a:off x="4389120" y="4754880"/>
-            <a:ext cx="6675120" cy="548640"/>
-          </a:xfrm>
-          <a:prstGeom prst="rect">
-            <a:avLst/>
-          </a:prstGeom>
-          <a:noFill/>
-          <a:ln/>
-        </p:spPr>
-        <p:txBody>
-          <a:bodyPr wrap="square" rtlCol="0" anchor="ctr"/>
-          <a:lstStyle/>
-          <a:p>
-            <a:pPr indent="0" marL="0">
-              <a:buNone/>
-            </a:pPr>
-            <a:r>
-              <a:rPr lang="en-US" sz="1300" dirty="0">
-                <a:solidFill>
-                  <a:srgbClr val="8A8780"/>
-                </a:solidFill>
-                <a:latin typeface="JetBrains Mono" pitchFamily="34" charset="0"/>
-                <a:ea typeface="JetBrains Mono" pitchFamily="34" charset="-122"/>
-                <a:cs typeface="JetBrains Mono" pitchFamily="34" charset="-120"/>
-              </a:rPr>
-              <a:t>图标增加黑色底，视觉更统一</a:t>
-            </a:r>
-            <a:endParaRPr lang="en-US" sz="1300" dirty="0"/>
-          </a:p>
-        </p:txBody>
-      </p:sp>
-      <p:sp>
-        <p:nvSpPr>
-          <p:cNvPr id="31" name="Shape 29"/>
-          <p:cNvSpPr/>
-          <p:nvPr/>
-        </p:nvSpPr>
-        <p:spPr>
-          <a:xfrm>
-            <a:off x="731520" y="5394960"/>
-            <a:ext cx="10515600" cy="548640"/>
-          </a:xfrm>
-          <a:prstGeom prst="roundRect">
-            <a:avLst>
-              <a:gd name="adj" fmla="val 13333"/>
-            </a:avLst>
-          </a:prstGeom>
-          <a:solidFill>
-            <a:srgbClr val="151518"/>
-          </a:solidFill>
-          <a:ln w="25400">
-            <a:solidFill>
-              <a:srgbClr val="FD79A8"/>
-            </a:solidFill>
-            <a:prstDash val="solid"/>
-          </a:ln>
-        </p:spPr>
-      </p:sp>
-      <p:sp>
-        <p:nvSpPr>
-          <p:cNvPr id="32" name="Shape 30"/>
-          <p:cNvSpPr/>
-          <p:nvPr/>
-        </p:nvSpPr>
-        <p:spPr>
-          <a:xfrm>
-            <a:off x="1005840" y="5504688"/>
-            <a:ext cx="320040" cy="320040"/>
-          </a:xfrm>
-          <a:prstGeom prst="ellipse">
-            <a:avLst/>
-          </a:prstGeom>
-          <a:solidFill>
-            <a:srgbClr val="FD79A8"/>
-          </a:solidFill>
-          <a:ln/>
-        </p:spPr>
-      </p:sp>
-      <p:sp>
-        <p:nvSpPr>
-          <p:cNvPr id="33" name="Text 31"/>
-          <p:cNvSpPr/>
-          <p:nvPr/>
-        </p:nvSpPr>
-        <p:spPr>
-          <a:xfrm>
-            <a:off x="1005840" y="5504688"/>
-            <a:ext cx="320040" cy="320040"/>
-          </a:xfrm>
-          <a:prstGeom prst="rect">
-            <a:avLst/>
-          </a:prstGeom>
-          <a:noFill/>
-          <a:ln/>
-        </p:spPr>
-        <p:txBody>
-          <a:bodyPr wrap="square" rtlCol="0" anchor="ctr"/>
-          <a:lstStyle/>
-          <a:p>
-            <a:pPr algn="ctr" indent="0" marL="0">
-              <a:buNone/>
-            </a:pPr>
-            <a:r>
-              <a:rPr lang="en-US" sz="1400" b="1" dirty="0">
-                <a:solidFill>
-                  <a:srgbClr val="0B0B0E"/>
-                </a:solidFill>
-                <a:latin typeface="JetBrains Mono" pitchFamily="34" charset="0"/>
-                <a:ea typeface="JetBrains Mono" pitchFamily="34" charset="-122"/>
-                <a:cs typeface="JetBrains Mono" pitchFamily="34" charset="-120"/>
-              </a:rPr>
-              <a:t>6</a:t>
-            </a:r>
-            <a:endParaRPr lang="en-US" sz="1400" dirty="0"/>
-          </a:p>
-        </p:txBody>
-      </p:sp>
-      <p:sp>
-        <p:nvSpPr>
-          <p:cNvPr id="34" name="Text 32"/>
-          <p:cNvSpPr/>
-          <p:nvPr/>
-        </p:nvSpPr>
-        <p:spPr>
-          <a:xfrm>
-            <a:off x="1554480" y="5394960"/>
-            <a:ext cx="2743200" cy="548640"/>
-          </a:xfrm>
-          <a:prstGeom prst="rect">
-            <a:avLst/>
-          </a:prstGeom>
-          <a:noFill/>
-          <a:ln/>
-        </p:spPr>
-        <p:txBody>
-          <a:bodyPr wrap="square" rtlCol="0" anchor="ctr"/>
-          <a:lstStyle/>
-          <a:p>
-            <a:pPr indent="0" marL="0">
-              <a:buNone/>
-            </a:pPr>
-            <a:r>
-              <a:rPr lang="en-US" sz="1600" b="1" dirty="0">
-                <a:solidFill>
-                  <a:srgbClr val="F2EFEA"/>
-                </a:solidFill>
-                <a:latin typeface="JetBrains Mono" pitchFamily="34" charset="0"/>
-                <a:ea typeface="JetBrains Mono" pitchFamily="34" charset="-122"/>
-                <a:cs typeface="JetBrains Mono" pitchFamily="34" charset="-120"/>
-              </a:rPr>
-              <a:t>体验优化</a:t>
-            </a:r>
-            <a:endParaRPr lang="en-US" sz="1600" dirty="0"/>
-          </a:p>
-        </p:txBody>
-      </p:sp>
-      <p:sp>
-        <p:nvSpPr>
-          <p:cNvPr id="35" name="Text 33"/>
-          <p:cNvSpPr/>
-          <p:nvPr/>
-        </p:nvSpPr>
-        <p:spPr>
-          <a:xfrm>
-            <a:off x="4389120" y="5394960"/>
-            <a:ext cx="6675120" cy="548640"/>
-          </a:xfrm>
-          <a:prstGeom prst="rect">
-            <a:avLst/>
-          </a:prstGeom>
-          <a:noFill/>
-          <a:ln/>
-        </p:spPr>
-        <p:txBody>
-          <a:bodyPr wrap="square" rtlCol="0" anchor="ctr"/>
-          <a:lstStyle/>
-          <a:p>
-            <a:pPr indent="0" marL="0">
-              <a:buNone/>
-            </a:pPr>
-            <a:r>
-              <a:rPr lang="en-US" sz="1300" dirty="0">
-                <a:solidFill>
-                  <a:srgbClr val="8A8780"/>
-                </a:solidFill>
-                <a:latin typeface="JetBrains Mono" pitchFamily="34" charset="0"/>
-                <a:ea typeface="JetBrains Mono" pitchFamily="34" charset="-122"/>
-                <a:cs typeface="JetBrains Mono" pitchFamily="34" charset="-120"/>
-              </a:rPr>
-              <a:t>listPackages 60 秒缓存，二次打开秒开</a:t>
-            </a:r>
-            <a:endParaRPr lang="en-US" sz="1300" dirty="0"/>
-          </a:p>
-        </p:txBody>
-      </p:sp>
-      <p:sp>
-        <p:nvSpPr>
-          <p:cNvPr id="36" name="Text 34"/>
           <p:cNvSpPr/>
           <p:nvPr/>
         </p:nvSpPr>
